--- a/deck/IC_Deck_Zellis_Rightsizing.pptx
+++ b/deck/IC_Deck_Zellis_Rightsizing.pptx
@@ -4475,7 +4475,7 @@
               <a:defRPr sz="1600"/>
             </a:pPr>
             <a:r>
-              <a:t>1. Productivity diagnostic at business-unit level (Zellis / Moorepay / Benifex): reconcile the group-level 34% gap to unit-level drivers - spans of control, service mix, delivery model.</a:t>
+              <a:t>1. Productivity diagnostic at business-unit level (Zellis / Moorepay / Benifex): reconcile the group-level 27% gap to unit-level drivers - spans of control, service mix, delivery model.</a:t>
             </a:r>
           </a:p>
           <a:p>
